--- a/slides/TP557_7_Regressão_com_DNNs_parte_I.pptx
+++ b/slides/TP557_7_Regressão_com_DNNs_parte_I.pptx
@@ -5,10 +5,10 @@
     <p:sldMasterId id="2147483648" r:id="rId1"/>
   </p:sldMasterIdLst>
   <p:notesMasterIdLst>
-    <p:notesMasterId r:id="rId38"/>
+    <p:notesMasterId r:id="rId39"/>
   </p:notesMasterIdLst>
   <p:handoutMasterIdLst>
-    <p:handoutMasterId r:id="rId39"/>
+    <p:handoutMasterId r:id="rId40"/>
   </p:handoutMasterIdLst>
   <p:sldIdLst>
     <p:sldId id="256" r:id="rId2"/>
@@ -42,11 +42,12 @@
     <p:sldId id="426" r:id="rId30"/>
     <p:sldId id="405" r:id="rId31"/>
     <p:sldId id="321" r:id="rId32"/>
-    <p:sldId id="436" r:id="rId33"/>
-    <p:sldId id="293" r:id="rId34"/>
-    <p:sldId id="306" r:id="rId35"/>
-    <p:sldId id="430" r:id="rId36"/>
-    <p:sldId id="432" r:id="rId37"/>
+    <p:sldId id="437" r:id="rId33"/>
+    <p:sldId id="436" r:id="rId34"/>
+    <p:sldId id="293" r:id="rId35"/>
+    <p:sldId id="306" r:id="rId36"/>
+    <p:sldId id="430" r:id="rId37"/>
+    <p:sldId id="432" r:id="rId38"/>
   </p:sldIdLst>
   <p:sldSz cx="12192000" cy="6858000"/>
   <p:notesSz cx="7315200" cy="9601200"/>
@@ -310,7 +311,7 @@
           <a:p>
             <a:fld id="{144F1436-6906-4D93-B7A2-786C327BFA14}" type="datetimeFigureOut">
               <a:rPr lang="nl-BE" smtClean="0"/>
-              <a:t>8/09/2023</a:t>
+              <a:t>9/04/2025</a:t>
             </a:fld>
             <a:endParaRPr lang="nl-BE"/>
           </a:p>
@@ -376,7 +377,7 @@
           <a:p>
             <a:fld id="{F7E56D9B-79AD-444A-AFED-DEC23408F8B4}" type="slidenum">
               <a:rPr lang="nl-BE" smtClean="0"/>
-              <a:t>‹nº›</a:t>
+              <a:t>‹#›</a:t>
             </a:fld>
             <a:endParaRPr lang="nl-BE"/>
           </a:p>
@@ -475,7 +476,7 @@
           <a:p>
             <a:fld id="{AA8CD09E-2914-4F47-B6C1-51B2C31814C9}" type="datetimeFigureOut">
               <a:rPr lang="pt-BR" smtClean="0"/>
-              <a:t>08/09/2023</a:t>
+              <a:t>09/04/2025</a:t>
             </a:fld>
             <a:endParaRPr lang="pt-BR"/>
           </a:p>
@@ -633,7 +634,7 @@
           <a:p>
             <a:fld id="{6FC8D850-966F-45A6-8DE7-15B891E7D40D}" type="slidenum">
               <a:rPr lang="pt-BR" smtClean="0"/>
-              <a:t>‹nº›</a:t>
+              <a:t>‹#›</a:t>
             </a:fld>
             <a:endParaRPr lang="pt-BR"/>
           </a:p>
@@ -923,6 +924,64 @@
                 <a:effectLst/>
               </a:rPr>
               <a:t>que ocorrem durante o treinamento do modelo no conjunto de treinamento.</a:t>
+            </a:r>
+          </a:p>
+          <a:p>
+            <a:endParaRPr lang="pt-BR" dirty="0"/>
+          </a:p>
+          <a:p>
+            <a:pPr marL="0" marR="0" lvl="0" indent="0" algn="l" defTabSz="914400" rtl="0" eaLnBrk="1" fontAlgn="auto" latinLnBrk="0" hangingPunct="1">
+              <a:lnSpc>
+                <a:spcPct val="100000"/>
+              </a:lnSpc>
+              <a:spcBef>
+                <a:spcPts val="0"/>
+              </a:spcBef>
+              <a:spcAft>
+                <a:spcPts val="0"/>
+              </a:spcAft>
+              <a:buClrTx/>
+              <a:buSzTx/>
+              <a:buFontTx/>
+              <a:buNone/>
+              <a:tabLst/>
+              <a:defRPr/>
+            </a:pPr>
+            <a:r>
+              <a:rPr lang="pt-BR" dirty="0"/>
+              <a:t>As arquiteturas de hardware modernas (como </a:t>
+            </a:r>
+            <a:r>
+              <a:rPr lang="pt-BR" dirty="0" err="1"/>
+              <a:t>GPUs</a:t>
+            </a:r>
+            <a:r>
+              <a:rPr lang="pt-BR" dirty="0"/>
+              <a:t> e </a:t>
+            </a:r>
+            <a:r>
+              <a:rPr lang="pt-BR" dirty="0" err="1"/>
+              <a:t>TPUs</a:t>
+            </a:r>
+            <a:r>
+              <a:rPr lang="pt-BR" dirty="0"/>
+              <a:t>) são otimizadas para </a:t>
+            </a:r>
+            <a:r>
+              <a:rPr lang="pt-BR" b="1" dirty="0"/>
+              <a:t>operações vetoriais e matriciais em blocos de tamanho fixo</a:t>
+            </a:r>
+            <a:r>
+              <a:rPr lang="pt-BR" dirty="0"/>
+              <a:t>, geralmente </a:t>
+            </a:r>
+            <a:r>
+              <a:rPr lang="pt-BR" b="1" dirty="0"/>
+              <a:t>potências de 2</a:t>
+            </a:r>
+            <a:r>
+              <a:rPr lang="pt-BR" dirty="0"/>
+              <a:t>.</a:t>
             </a:r>
           </a:p>
           <a:p>
@@ -1957,6 +2016,137 @@
   <p:cSld>
     <p:spTree>
       <p:nvGrpSpPr>
+        <p:cNvPr id="1" name="">
+          <a:extLst>
+            <a:ext uri="{FF2B5EF4-FFF2-40B4-BE49-F238E27FC236}">
+              <a16:creationId xmlns:a16="http://schemas.microsoft.com/office/drawing/2014/main" id="{760F0D1C-F60F-4E43-2447-20068B050F36}"/>
+            </a:ext>
+          </a:extLst>
+        </p:cNvPr>
+        <p:cNvGrpSpPr/>
+        <p:nvPr/>
+      </p:nvGrpSpPr>
+      <p:grpSpPr>
+        <a:xfrm>
+          <a:off x="0" y="0"/>
+          <a:ext cx="0" cy="0"/>
+          <a:chOff x="0" y="0"/>
+          <a:chExt cx="0" cy="0"/>
+        </a:xfrm>
+      </p:grpSpPr>
+      <p:sp>
+        <p:nvSpPr>
+          <p:cNvPr id="2" name="Espaço Reservado para Imagem de Slide 1">
+            <a:extLst>
+              <a:ext uri="{FF2B5EF4-FFF2-40B4-BE49-F238E27FC236}">
+                <a16:creationId xmlns:a16="http://schemas.microsoft.com/office/drawing/2014/main" id="{FF0F71CF-B64E-0118-9DD3-2AA3F940AA89}"/>
+              </a:ext>
+            </a:extLst>
+          </p:cNvPr>
+          <p:cNvSpPr>
+            <a:spLocks noGrp="1" noRot="1" noChangeAspect="1"/>
+          </p:cNvSpPr>
+          <p:nvPr>
+            <p:ph type="sldImg"/>
+          </p:nvPr>
+        </p:nvSpPr>
+        <p:spPr/>
+      </p:sp>
+      <p:sp>
+        <p:nvSpPr>
+          <p:cNvPr id="3" name="Espaço Reservado para Anotações 2">
+            <a:extLst>
+              <a:ext uri="{FF2B5EF4-FFF2-40B4-BE49-F238E27FC236}">
+                <a16:creationId xmlns:a16="http://schemas.microsoft.com/office/drawing/2014/main" id="{DA23629B-19D2-5867-EE1B-40A203A59020}"/>
+              </a:ext>
+            </a:extLst>
+          </p:cNvPr>
+          <p:cNvSpPr>
+            <a:spLocks noGrp="1"/>
+          </p:cNvSpPr>
+          <p:nvPr>
+            <p:ph type="body" idx="1"/>
+          </p:nvPr>
+        </p:nvSpPr>
+        <p:spPr/>
+        <p:txBody>
+          <a:bodyPr/>
+          <a:lstStyle/>
+          <a:p>
+            <a:pPr marL="0" marR="0" lvl="0" indent="0" algn="l" defTabSz="914400" rtl="0" eaLnBrk="1" fontAlgn="auto" latinLnBrk="0" hangingPunct="1">
+              <a:lnSpc>
+                <a:spcPct val="100000"/>
+              </a:lnSpc>
+              <a:spcBef>
+                <a:spcPts val="0"/>
+              </a:spcBef>
+              <a:spcAft>
+                <a:spcPts val="0"/>
+              </a:spcAft>
+              <a:buClrTx/>
+              <a:buSzTx/>
+              <a:buFontTx/>
+              <a:buNone/>
+              <a:tabLst/>
+              <a:defRPr/>
+            </a:pPr>
+            <a:r>
+              <a:rPr lang="pt-BR" dirty="0"/>
+              <a:t>https://colab.research.google.com/github/zz4fap/tp557-iot-ml/blob/master/examples/Usando_callbacks.ipynb</a:t>
+            </a:r>
+          </a:p>
+          <a:p>
+            <a:endParaRPr lang="pt-BR" dirty="0"/>
+          </a:p>
+        </p:txBody>
+      </p:sp>
+      <p:sp>
+        <p:nvSpPr>
+          <p:cNvPr id="4" name="Espaço Reservado para Número de Slide 3">
+            <a:extLst>
+              <a:ext uri="{FF2B5EF4-FFF2-40B4-BE49-F238E27FC236}">
+                <a16:creationId xmlns:a16="http://schemas.microsoft.com/office/drawing/2014/main" id="{3FA40C03-6F03-8ADB-07B8-65CC35651969}"/>
+              </a:ext>
+            </a:extLst>
+          </p:cNvPr>
+          <p:cNvSpPr>
+            <a:spLocks noGrp="1"/>
+          </p:cNvSpPr>
+          <p:nvPr>
+            <p:ph type="sldNum" sz="quarter" idx="5"/>
+          </p:nvPr>
+        </p:nvSpPr>
+        <p:spPr/>
+        <p:txBody>
+          <a:bodyPr/>
+          <a:lstStyle/>
+          <a:p>
+            <a:fld id="{6FC8D850-966F-45A6-8DE7-15B891E7D40D}" type="slidenum">
+              <a:rPr lang="pt-BR" smtClean="0"/>
+              <a:t>32</a:t>
+            </a:fld>
+            <a:endParaRPr lang="pt-BR"/>
+          </a:p>
+        </p:txBody>
+      </p:sp>
+    </p:spTree>
+    <p:extLst>
+      <p:ext uri="{BB962C8B-B14F-4D97-AF65-F5344CB8AC3E}">
+        <p14:creationId xmlns:p14="http://schemas.microsoft.com/office/powerpoint/2010/main" val="972333045"/>
+      </p:ext>
+    </p:extLst>
+  </p:cSld>
+  <p:clrMapOvr>
+    <a:masterClrMapping/>
+  </p:clrMapOvr>
+</p:notes>
+</file>
+
+<file path=ppt/notesSlides/notesSlide21.xml><?xml version="1.0" encoding="utf-8"?>
+<p:notes xmlns:a="http://schemas.openxmlformats.org/drawingml/2006/main" xmlns:r="http://schemas.openxmlformats.org/officeDocument/2006/relationships" xmlns:p="http://schemas.openxmlformats.org/presentationml/2006/main">
+  <p:cSld>
+    <p:spTree>
+      <p:nvGrpSpPr>
         <p:cNvPr id="1" name=""/>
         <p:cNvGrpSpPr/>
         <p:nvPr/>
@@ -2066,7 +2256,7 @@
           <a:p>
             <a:fld id="{6FC8D850-966F-45A6-8DE7-15B891E7D40D}" type="slidenum">
               <a:rPr lang="pt-BR" smtClean="0"/>
-              <a:t>32</a:t>
+              <a:t>33</a:t>
             </a:fld>
             <a:endParaRPr lang="pt-BR"/>
           </a:p>
@@ -3149,7 +3339,7 @@
           <a:p>
             <a:fld id="{63289F7E-B80B-496E-81B4-D396C37C9454}" type="datetimeFigureOut">
               <a:rPr lang="pt-BR" smtClean="0"/>
-              <a:t>08/09/2023</a:t>
+              <a:t>09/04/2025</a:t>
             </a:fld>
             <a:endParaRPr lang="pt-BR"/>
           </a:p>
@@ -3203,7 +3393,7 @@
           <a:p>
             <a:fld id="{1A7E88B7-70CE-4035-AE73-13FA6FB985D4}" type="slidenum">
               <a:rPr lang="pt-BR" smtClean="0"/>
-              <a:t>‹nº›</a:t>
+              <a:t>‹#›</a:t>
             </a:fld>
             <a:endParaRPr lang="pt-BR"/>
           </a:p>
@@ -3347,7 +3537,7 @@
           <a:p>
             <a:fld id="{63289F7E-B80B-496E-81B4-D396C37C9454}" type="datetimeFigureOut">
               <a:rPr lang="pt-BR" smtClean="0"/>
-              <a:t>08/09/2023</a:t>
+              <a:t>09/04/2025</a:t>
             </a:fld>
             <a:endParaRPr lang="pt-BR"/>
           </a:p>
@@ -3401,7 +3591,7 @@
           <a:p>
             <a:fld id="{1A7E88B7-70CE-4035-AE73-13FA6FB985D4}" type="slidenum">
               <a:rPr lang="pt-BR" smtClean="0"/>
-              <a:t>‹nº›</a:t>
+              <a:t>‹#›</a:t>
             </a:fld>
             <a:endParaRPr lang="pt-BR"/>
           </a:p>
@@ -3555,7 +3745,7 @@
           <a:p>
             <a:fld id="{63289F7E-B80B-496E-81B4-D396C37C9454}" type="datetimeFigureOut">
               <a:rPr lang="pt-BR" smtClean="0"/>
-              <a:t>08/09/2023</a:t>
+              <a:t>09/04/2025</a:t>
             </a:fld>
             <a:endParaRPr lang="pt-BR"/>
           </a:p>
@@ -3609,7 +3799,7 @@
           <a:p>
             <a:fld id="{1A7E88B7-70CE-4035-AE73-13FA6FB985D4}" type="slidenum">
               <a:rPr lang="pt-BR" smtClean="0"/>
-              <a:t>‹nº›</a:t>
+              <a:t>‹#›</a:t>
             </a:fld>
             <a:endParaRPr lang="pt-BR"/>
           </a:p>
@@ -3753,7 +3943,7 @@
           <a:p>
             <a:fld id="{63289F7E-B80B-496E-81B4-D396C37C9454}" type="datetimeFigureOut">
               <a:rPr lang="pt-BR" smtClean="0"/>
-              <a:t>08/09/2023</a:t>
+              <a:t>09/04/2025</a:t>
             </a:fld>
             <a:endParaRPr lang="pt-BR"/>
           </a:p>
@@ -3807,7 +3997,7 @@
           <a:p>
             <a:fld id="{1A7E88B7-70CE-4035-AE73-13FA6FB985D4}" type="slidenum">
               <a:rPr lang="pt-BR" smtClean="0"/>
-              <a:t>‹nº›</a:t>
+              <a:t>‹#›</a:t>
             </a:fld>
             <a:endParaRPr lang="pt-BR"/>
           </a:p>
@@ -4028,7 +4218,7 @@
           <a:p>
             <a:fld id="{63289F7E-B80B-496E-81B4-D396C37C9454}" type="datetimeFigureOut">
               <a:rPr lang="pt-BR" smtClean="0"/>
-              <a:t>08/09/2023</a:t>
+              <a:t>09/04/2025</a:t>
             </a:fld>
             <a:endParaRPr lang="pt-BR"/>
           </a:p>
@@ -4082,7 +4272,7 @@
           <a:p>
             <a:fld id="{1A7E88B7-70CE-4035-AE73-13FA6FB985D4}" type="slidenum">
               <a:rPr lang="pt-BR" smtClean="0"/>
-              <a:t>‹nº›</a:t>
+              <a:t>‹#›</a:t>
             </a:fld>
             <a:endParaRPr lang="pt-BR"/>
           </a:p>
@@ -4293,7 +4483,7 @@
           <a:p>
             <a:fld id="{63289F7E-B80B-496E-81B4-D396C37C9454}" type="datetimeFigureOut">
               <a:rPr lang="pt-BR" smtClean="0"/>
-              <a:t>08/09/2023</a:t>
+              <a:t>09/04/2025</a:t>
             </a:fld>
             <a:endParaRPr lang="pt-BR"/>
           </a:p>
@@ -4347,7 +4537,7 @@
           <a:p>
             <a:fld id="{1A7E88B7-70CE-4035-AE73-13FA6FB985D4}" type="slidenum">
               <a:rPr lang="pt-BR" smtClean="0"/>
-              <a:t>‹nº›</a:t>
+              <a:t>‹#›</a:t>
             </a:fld>
             <a:endParaRPr lang="pt-BR"/>
           </a:p>
@@ -4705,7 +4895,7 @@
           <a:p>
             <a:fld id="{63289F7E-B80B-496E-81B4-D396C37C9454}" type="datetimeFigureOut">
               <a:rPr lang="pt-BR" smtClean="0"/>
-              <a:t>08/09/2023</a:t>
+              <a:t>09/04/2025</a:t>
             </a:fld>
             <a:endParaRPr lang="pt-BR"/>
           </a:p>
@@ -4759,7 +4949,7 @@
           <a:p>
             <a:fld id="{1A7E88B7-70CE-4035-AE73-13FA6FB985D4}" type="slidenum">
               <a:rPr lang="pt-BR" smtClean="0"/>
-              <a:t>‹nº›</a:t>
+              <a:t>‹#›</a:t>
             </a:fld>
             <a:endParaRPr lang="pt-BR"/>
           </a:p>
@@ -4846,7 +5036,7 @@
           <a:p>
             <a:fld id="{63289F7E-B80B-496E-81B4-D396C37C9454}" type="datetimeFigureOut">
               <a:rPr lang="pt-BR" smtClean="0"/>
-              <a:t>08/09/2023</a:t>
+              <a:t>09/04/2025</a:t>
             </a:fld>
             <a:endParaRPr lang="pt-BR"/>
           </a:p>
@@ -4900,7 +5090,7 @@
           <a:p>
             <a:fld id="{1A7E88B7-70CE-4035-AE73-13FA6FB985D4}" type="slidenum">
               <a:rPr lang="pt-BR" smtClean="0"/>
-              <a:t>‹nº›</a:t>
+              <a:t>‹#›</a:t>
             </a:fld>
             <a:endParaRPr lang="pt-BR"/>
           </a:p>
@@ -4959,7 +5149,7 @@
           <a:p>
             <a:fld id="{63289F7E-B80B-496E-81B4-D396C37C9454}" type="datetimeFigureOut">
               <a:rPr lang="pt-BR" smtClean="0"/>
-              <a:t>08/09/2023</a:t>
+              <a:t>09/04/2025</a:t>
             </a:fld>
             <a:endParaRPr lang="pt-BR"/>
           </a:p>
@@ -5013,7 +5203,7 @@
           <a:p>
             <a:fld id="{1A7E88B7-70CE-4035-AE73-13FA6FB985D4}" type="slidenum">
               <a:rPr lang="pt-BR" smtClean="0"/>
-              <a:t>‹nº›</a:t>
+              <a:t>‹#›</a:t>
             </a:fld>
             <a:endParaRPr lang="pt-BR"/>
           </a:p>
@@ -5270,7 +5460,7 @@
           <a:p>
             <a:fld id="{63289F7E-B80B-496E-81B4-D396C37C9454}" type="datetimeFigureOut">
               <a:rPr lang="pt-BR" smtClean="0"/>
-              <a:t>08/09/2023</a:t>
+              <a:t>09/04/2025</a:t>
             </a:fld>
             <a:endParaRPr lang="pt-BR"/>
           </a:p>
@@ -5324,7 +5514,7 @@
           <a:p>
             <a:fld id="{1A7E88B7-70CE-4035-AE73-13FA6FB985D4}" type="slidenum">
               <a:rPr lang="pt-BR" smtClean="0"/>
-              <a:t>‹nº›</a:t>
+              <a:t>‹#›</a:t>
             </a:fld>
             <a:endParaRPr lang="pt-BR"/>
           </a:p>
@@ -5558,7 +5748,7 @@
           <a:p>
             <a:fld id="{63289F7E-B80B-496E-81B4-D396C37C9454}" type="datetimeFigureOut">
               <a:rPr lang="pt-BR" smtClean="0"/>
-              <a:t>08/09/2023</a:t>
+              <a:t>09/04/2025</a:t>
             </a:fld>
             <a:endParaRPr lang="pt-BR"/>
           </a:p>
@@ -5612,7 +5802,7 @@
           <a:p>
             <a:fld id="{1A7E88B7-70CE-4035-AE73-13FA6FB985D4}" type="slidenum">
               <a:rPr lang="pt-BR" smtClean="0"/>
-              <a:t>‹nº›</a:t>
+              <a:t>‹#›</a:t>
             </a:fld>
             <a:endParaRPr lang="pt-BR"/>
           </a:p>
@@ -5799,7 +5989,7 @@
           <a:p>
             <a:fld id="{63289F7E-B80B-496E-81B4-D396C37C9454}" type="datetimeFigureOut">
               <a:rPr lang="pt-BR" smtClean="0"/>
-              <a:t>08/09/2023</a:t>
+              <a:t>09/04/2025</a:t>
             </a:fld>
             <a:endParaRPr lang="pt-BR"/>
           </a:p>
@@ -5889,7 +6079,7 @@
           <a:p>
             <a:fld id="{1A7E88B7-70CE-4035-AE73-13FA6FB985D4}" type="slidenum">
               <a:rPr lang="pt-BR" smtClean="0"/>
-              <a:t>‹nº›</a:t>
+              <a:t>‹#›</a:t>
             </a:fld>
             <a:endParaRPr lang="pt-BR"/>
           </a:p>
@@ -6591,7 +6781,22 @@
               <a:rPr lang="pt-BR" b="0" i="0" dirty="0">
                 <a:effectLst/>
               </a:rPr>
-              <a:t>, ou seja, elas fluem da entrada para as camadas ocultas e, finalmente, para a camada de saída, sem recursões.</a:t>
+              <a:t>, ou seja, elas fluem da entrada passando pelas camadas ocultas e, finalmente, para a camada de saída, </a:t>
+            </a:r>
+            <a:r>
+              <a:rPr lang="pt-BR" b="1" i="1" dirty="0">
+                <a:solidFill>
+                  <a:schemeClr val="accent2"/>
+                </a:solidFill>
+                <a:effectLst/>
+              </a:rPr>
+              <a:t>sem recursões</a:t>
+            </a:r>
+            <a:r>
+              <a:rPr lang="pt-BR" b="0" i="0" dirty="0">
+                <a:effectLst/>
+              </a:rPr>
+              <a:t>.</a:t>
             </a:r>
           </a:p>
         </p:txBody>
@@ -8901,8 +9106,8 @@
           </a:p>
         </p:txBody>
       </p:sp>
-      <mc:AlternateContent xmlns:mc="http://schemas.openxmlformats.org/markup-compatibility/2006">
-        <mc:Choice xmlns:a14="http://schemas.microsoft.com/office/drawing/2010/main" Requires="a14">
+      <mc:AlternateContent xmlns:mc="http://schemas.openxmlformats.org/markup-compatibility/2006" xmlns:a14="http://schemas.microsoft.com/office/drawing/2010/main">
+        <mc:Choice Requires="a14">
           <p:sp>
             <p:nvSpPr>
               <p:cNvPr id="37" name="CaixaDeTexto 36">
@@ -8983,7 +9188,7 @@
             </p:txBody>
           </p:sp>
         </mc:Choice>
-        <mc:Fallback>
+        <mc:Fallback xmlns="">
           <p:sp>
             <p:nvSpPr>
               <p:cNvPr id="37" name="CaixaDeTexto 36">
@@ -9028,8 +9233,8 @@
           </p:sp>
         </mc:Fallback>
       </mc:AlternateContent>
-      <mc:AlternateContent xmlns:mc="http://schemas.openxmlformats.org/markup-compatibility/2006">
-        <mc:Choice xmlns:a14="http://schemas.microsoft.com/office/drawing/2010/main" Requires="a14">
+      <mc:AlternateContent xmlns:mc="http://schemas.openxmlformats.org/markup-compatibility/2006" xmlns:a14="http://schemas.microsoft.com/office/drawing/2010/main">
+        <mc:Choice Requires="a14">
           <p:sp>
             <p:nvSpPr>
               <p:cNvPr id="39" name="CaixaDeTexto 38">
@@ -9110,7 +9315,7 @@
             </p:txBody>
           </p:sp>
         </mc:Choice>
-        <mc:Fallback>
+        <mc:Fallback xmlns="">
           <p:sp>
             <p:nvSpPr>
               <p:cNvPr id="39" name="CaixaDeTexto 38">
@@ -11613,8 +11818,8 @@
           </a:p>
         </p:txBody>
       </p:sp>
-      <mc:AlternateContent xmlns:mc="http://schemas.openxmlformats.org/markup-compatibility/2006">
-        <mc:Choice xmlns:a14="http://schemas.microsoft.com/office/drawing/2010/main" Requires="a14">
+      <mc:AlternateContent xmlns:mc="http://schemas.openxmlformats.org/markup-compatibility/2006" xmlns:a14="http://schemas.microsoft.com/office/drawing/2010/main">
+        <mc:Choice Requires="a14">
           <p:sp>
             <p:nvSpPr>
               <p:cNvPr id="37" name="CaixaDeTexto 36">
@@ -11695,7 +11900,7 @@
             </p:txBody>
           </p:sp>
         </mc:Choice>
-        <mc:Fallback>
+        <mc:Fallback xmlns="">
           <p:sp>
             <p:nvSpPr>
               <p:cNvPr id="37" name="CaixaDeTexto 36">
@@ -11740,8 +11945,8 @@
           </p:sp>
         </mc:Fallback>
       </mc:AlternateContent>
-      <mc:AlternateContent xmlns:mc="http://schemas.openxmlformats.org/markup-compatibility/2006">
-        <mc:Choice xmlns:a14="http://schemas.microsoft.com/office/drawing/2010/main" Requires="a14">
+      <mc:AlternateContent xmlns:mc="http://schemas.openxmlformats.org/markup-compatibility/2006" xmlns:a14="http://schemas.microsoft.com/office/drawing/2010/main">
+        <mc:Choice Requires="a14">
           <p:sp>
             <p:nvSpPr>
               <p:cNvPr id="39" name="CaixaDeTexto 38">
@@ -11822,7 +12027,7 @@
             </p:txBody>
           </p:sp>
         </mc:Choice>
-        <mc:Fallback>
+        <mc:Fallback xmlns="">
           <p:sp>
             <p:nvSpPr>
               <p:cNvPr id="39" name="CaixaDeTexto 38">
@@ -13555,7 +13760,7 @@
             </a:r>
             <a:r>
               <a:rPr lang="pt-BR" dirty="0"/>
-              <a:t>), então sabemos que é uma rede </a:t>
+              <a:t>), então sabemos que é uma camada </a:t>
             </a:r>
             <a:r>
               <a:rPr lang="pt-BR" b="1" i="1" dirty="0"/>
@@ -36559,8 +36764,8 @@
           </a:p>
         </p:txBody>
       </p:sp>
-      <mc:AlternateContent xmlns:mc="http://schemas.openxmlformats.org/markup-compatibility/2006" xmlns:a14="http://schemas.microsoft.com/office/drawing/2010/main">
-        <mc:Choice Requires="a14">
+      <mc:AlternateContent xmlns:mc="http://schemas.openxmlformats.org/markup-compatibility/2006">
+        <mc:Choice xmlns:a14="http://schemas.microsoft.com/office/drawing/2010/main" Requires="a14">
           <p:sp>
             <p:nvSpPr>
               <p:cNvPr id="3" name="Espaço Reservado para Conteúdo 2">
@@ -36585,7 +36790,7 @@
             </p:spPr>
             <p:txBody>
               <a:bodyPr>
-                <a:normAutofit fontScale="92500"/>
+                <a:normAutofit fontScale="92500" lnSpcReduction="10000"/>
               </a:bodyPr>
               <a:lstStyle/>
               <a:p>
@@ -36627,6 +36832,11 @@
                   </a:rPr>
                   <a:t>Sabemos das aulas anteriores que a melhor função hipótese é dada por </a:t>
                 </a:r>
+              </a:p>
+              <a:p>
+                <a:pPr marL="0" indent="0" algn="ctr">
+                  <a:buNone/>
+                </a:pPr>
                 <a14:m>
                   <m:oMath xmlns:m="http://schemas.openxmlformats.org/officeDocument/2006/math">
                     <m:acc>
@@ -36753,7 +36963,7 @@
             </p:txBody>
           </p:sp>
         </mc:Choice>
-        <mc:Fallback xmlns="">
+        <mc:Fallback>
           <p:sp>
             <p:nvSpPr>
               <p:cNvPr id="3" name="Espaço Reservado para Conteúdo 2">
@@ -36778,7 +36988,7 @@
               <a:blipFill>
                 <a:blip r:embed="rId3"/>
                 <a:stretch>
-                  <a:fillRect l="-869" t="-3886" b="-2850"/>
+                  <a:fillRect l="-869" t="-5181"/>
                 </a:stretch>
               </a:blipFill>
             </p:spPr>
@@ -36787,7 +36997,7 @@
               <a:lstStyle/>
               <a:p>
                 <a:r>
-                  <a:rPr lang="pt-BR">
+                  <a:rPr lang="en-US">
                     <a:noFill/>
                   </a:rPr>
                   <a:t> </a:t>
@@ -38702,8 +38912,8 @@
           </a:p>
         </p:txBody>
       </p:sp>
-      <mc:AlternateContent xmlns:mc="http://schemas.openxmlformats.org/markup-compatibility/2006" xmlns:a14="http://schemas.microsoft.com/office/drawing/2010/main">
-        <mc:Choice Requires="a14">
+      <mc:AlternateContent xmlns:mc="http://schemas.openxmlformats.org/markup-compatibility/2006">
+        <mc:Choice xmlns:a14="http://schemas.microsoft.com/office/drawing/2010/main" Requires="a14">
           <p:sp>
             <p:nvSpPr>
               <p:cNvPr id="3" name="Espaço Reservado para Conteúdo 2">
@@ -38834,7 +39044,7 @@
             </p:txBody>
           </p:sp>
         </mc:Choice>
-        <mc:Fallback xmlns="">
+        <mc:Fallback>
           <p:sp>
             <p:nvSpPr>
               <p:cNvPr id="3" name="Espaço Reservado para Conteúdo 2">
@@ -38868,7 +39078,7 @@
               <a:lstStyle/>
               <a:p>
                 <a:r>
-                  <a:rPr lang="pt-BR">
+                  <a:rPr lang="en-US">
                     <a:noFill/>
                   </a:rPr>
                   <a:t> </a:t>
@@ -39256,13 +39466,13 @@
         </p:nvSpPr>
         <p:spPr>
           <a:xfrm>
-            <a:off x="838199" y="1825624"/>
-            <a:ext cx="11182351" cy="5032375"/>
+            <a:off x="5665509" y="1825624"/>
+            <a:ext cx="6355041" cy="5032375"/>
           </a:xfrm>
         </p:spPr>
         <p:txBody>
           <a:bodyPr>
-            <a:normAutofit fontScale="92500" lnSpcReduction="20000"/>
+            <a:normAutofit/>
           </a:bodyPr>
           <a:lstStyle/>
           <a:p>
@@ -39278,7 +39488,7 @@
             </a:pPr>
             <a:r>
               <a:rPr lang="pt-BR" dirty="0"/>
-              <a:t>Isso é bastante comum, especialmente ao treinar com grandes conjuntos de dados. </a:t>
+              <a:t>Isso é bastante comum, especialmente ao treinar grandes modelos com grandes conjuntos de dados. </a:t>
             </a:r>
           </a:p>
           <a:p>
@@ -39302,146 +39512,56 @@
               <a:rPr lang="pt-BR" dirty="0"/>
               <a:t> durante o treinamento. </a:t>
             </a:r>
-          </a:p>
-          <a:p>
-            <a:r>
-              <a:rPr lang="pt-BR" dirty="0"/>
-              <a:t>Podemos configurar o método </a:t>
-            </a:r>
-            <a:r>
-              <a:rPr lang="pt-BR" b="1" i="1" dirty="0" err="1"/>
-              <a:t>fit</a:t>
-            </a:r>
-            <a:r>
-              <a:rPr lang="pt-BR" b="1" i="1" dirty="0"/>
-              <a:t>()</a:t>
-            </a:r>
-            <a:r>
-              <a:rPr lang="pt-BR" dirty="0"/>
-              <a:t> para salvar pontos de verificação, mas como fazer esta configuração?</a:t>
-            </a:r>
-          </a:p>
-          <a:p>
-            <a:pPr lvl="1">
-              <a:buFont typeface="Wingdings" panose="05000000000000000000" pitchFamily="2" charset="2"/>
-              <a:buChar char="§"/>
-            </a:pPr>
-            <a:r>
-              <a:rPr lang="pt-BR" dirty="0"/>
-              <a:t>A resposta é: através de </a:t>
-            </a:r>
-            <a:r>
-              <a:rPr lang="pt-BR" b="1" i="1" dirty="0"/>
-              <a:t>callbacks</a:t>
-            </a:r>
-            <a:r>
-              <a:rPr lang="pt-BR" dirty="0"/>
-              <a:t>.</a:t>
-            </a:r>
-          </a:p>
-          <a:p>
-            <a:pPr lvl="1">
-              <a:buFont typeface="Wingdings" panose="05000000000000000000" pitchFamily="2" charset="2"/>
-              <a:buChar char="§"/>
-            </a:pPr>
-            <a:r>
-              <a:rPr lang="pt-BR" b="1" i="1" dirty="0"/>
-              <a:t>callbacks </a:t>
-            </a:r>
-            <a:r>
-              <a:rPr lang="pt-BR" dirty="0"/>
-              <a:t>são funções passadas como argumento para outras funções e chamadas quando um evento ocorrer.</a:t>
-            </a:r>
-          </a:p>
-          <a:p>
-            <a:r>
-              <a:rPr lang="pt-BR" dirty="0"/>
-              <a:t>O método </a:t>
-            </a:r>
-            <a:r>
-              <a:rPr lang="pt-BR" b="1" i="1" dirty="0" err="1"/>
-              <a:t>fit</a:t>
-            </a:r>
-            <a:r>
-              <a:rPr lang="pt-BR" b="1" i="1" dirty="0"/>
-              <a:t>()</a:t>
-            </a:r>
-            <a:r>
-              <a:rPr lang="pt-BR" dirty="0"/>
-              <a:t> possui um parâmetro chamado </a:t>
-            </a:r>
-            <a:r>
-              <a:rPr lang="pt-BR" b="1" i="1" dirty="0"/>
-              <a:t>callbacks</a:t>
-            </a:r>
-            <a:r>
-              <a:rPr lang="pt-BR" dirty="0"/>
-              <a:t>, que permite especificar uma lista de </a:t>
-            </a:r>
-            <a:r>
-              <a:rPr lang="pt-BR" b="1" i="1" dirty="0"/>
-              <a:t>callbacks</a:t>
-            </a:r>
-            <a:r>
-              <a:rPr lang="pt-BR" dirty="0"/>
-              <a:t> que o Keras </a:t>
-            </a:r>
-            <a:r>
-              <a:rPr lang="pt-BR" b="1" i="1" dirty="0"/>
-              <a:t>chamará durante o treinamento</a:t>
-            </a:r>
-            <a:r>
-              <a:rPr lang="pt-BR" dirty="0"/>
-              <a:t> no </a:t>
-            </a:r>
-            <a:r>
-              <a:rPr lang="pt-BR" b="1" i="1" dirty="0"/>
-              <a:t>início e no final do treinamento</a:t>
-            </a:r>
-            <a:r>
-              <a:rPr lang="pt-BR" dirty="0"/>
-              <a:t>, </a:t>
-            </a:r>
-            <a:r>
-              <a:rPr lang="pt-BR" b="1" i="1" dirty="0"/>
-              <a:t>no início e no final de cada época</a:t>
-            </a:r>
-            <a:r>
-              <a:rPr lang="pt-BR" dirty="0"/>
-              <a:t> e até </a:t>
-            </a:r>
-            <a:r>
-              <a:rPr lang="pt-BR" b="1" i="1" dirty="0"/>
-              <a:t>antes e depois do processamento de cada mini-batch</a:t>
-            </a:r>
-            <a:r>
-              <a:rPr lang="pt-BR" dirty="0"/>
-              <a:t>.</a:t>
-            </a:r>
-          </a:p>
-          <a:p>
-            <a:r>
-              <a:rPr lang="pt-BR" dirty="0"/>
-              <a:t>Veja todas as </a:t>
-            </a:r>
-            <a:r>
-              <a:rPr lang="pt-BR" b="1" i="1" dirty="0"/>
-              <a:t>callbacks</a:t>
-            </a:r>
-            <a:r>
-              <a:rPr lang="pt-BR" dirty="0"/>
-              <a:t> disponíveis em </a:t>
-            </a:r>
-            <a:r>
-              <a:rPr lang="pt-BR" dirty="0">
-                <a:hlinkClick r:id="rId3"/>
-              </a:rPr>
-              <a:t>https://keras.io/callbacks/</a:t>
-            </a:r>
-            <a:endParaRPr lang="pt-BR" dirty="0"/>
           </a:p>
         </p:txBody>
       </p:sp>
+      <p:pic>
+        <p:nvPicPr>
+          <p:cNvPr id="1026" name="Picture 2" descr="Callbacks in TensorFlow — Customize the Behavior of your training | by Aqsa  Kausar | Red Buffer | Medium">
+            <a:extLst>
+              <a:ext uri="{FF2B5EF4-FFF2-40B4-BE49-F238E27FC236}">
+                <a16:creationId xmlns:a16="http://schemas.microsoft.com/office/drawing/2014/main" id="{FA6DAAC1-95FA-CC55-54B6-9FA075D36E5A}"/>
+              </a:ext>
+            </a:extLst>
+          </p:cNvPr>
+          <p:cNvPicPr>
+            <a:picLocks noChangeAspect="1" noChangeArrowheads="1"/>
+          </p:cNvPicPr>
+          <p:nvPr/>
+        </p:nvPicPr>
+        <p:blipFill>
+          <a:blip r:embed="rId3">
+            <a:extLst>
+              <a:ext uri="{28A0092B-C50C-407E-A947-70E740481C1C}">
+                <a14:useLocalDpi xmlns:a14="http://schemas.microsoft.com/office/drawing/2010/main" val="0"/>
+              </a:ext>
+            </a:extLst>
+          </a:blip>
+          <a:srcRect/>
+          <a:stretch>
+            <a:fillRect/>
+          </a:stretch>
+        </p:blipFill>
+        <p:spPr bwMode="auto">
+          <a:xfrm>
+            <a:off x="459819" y="2541783"/>
+            <a:ext cx="4885180" cy="2747914"/>
+          </a:xfrm>
+          <a:prstGeom prst="rect">
+            <a:avLst/>
+          </a:prstGeom>
+          <a:noFill/>
+          <a:extLst>
+            <a:ext uri="{909E8E84-426E-40DD-AFC4-6F175D3DCCD1}">
+              <a14:hiddenFill xmlns:a14="http://schemas.microsoft.com/office/drawing/2010/main">
+                <a:solidFill>
+                  <a:srgbClr val="FFFFFF"/>
+                </a:solidFill>
+              </a14:hiddenFill>
+            </a:ext>
+          </a:extLst>
+        </p:spPr>
+      </p:pic>
     </p:spTree>
     <p:extLst>
       <p:ext uri="{BB962C8B-B14F-4D97-AF65-F5344CB8AC3E}">
@@ -39456,6 +39576,240 @@
 </file>
 
 <file path=ppt/slides/slide32.xml><?xml version="1.0" encoding="utf-8"?>
+<p:sld xmlns:a="http://schemas.openxmlformats.org/drawingml/2006/main" xmlns:r="http://schemas.openxmlformats.org/officeDocument/2006/relationships" xmlns:p="http://schemas.openxmlformats.org/presentationml/2006/main">
+  <p:cSld>
+    <p:spTree>
+      <p:nvGrpSpPr>
+        <p:cNvPr id="1" name="">
+          <a:extLst>
+            <a:ext uri="{FF2B5EF4-FFF2-40B4-BE49-F238E27FC236}">
+              <a16:creationId xmlns:a16="http://schemas.microsoft.com/office/drawing/2014/main" id="{84146A95-5902-5F5E-75FC-CFBBFED4DE08}"/>
+            </a:ext>
+          </a:extLst>
+        </p:cNvPr>
+        <p:cNvGrpSpPr/>
+        <p:nvPr/>
+      </p:nvGrpSpPr>
+      <p:grpSpPr>
+        <a:xfrm>
+          <a:off x="0" y="0"/>
+          <a:ext cx="0" cy="0"/>
+          <a:chOff x="0" y="0"/>
+          <a:chExt cx="0" cy="0"/>
+        </a:xfrm>
+      </p:grpSpPr>
+      <p:sp>
+        <p:nvSpPr>
+          <p:cNvPr id="2" name="Título 1">
+            <a:extLst>
+              <a:ext uri="{FF2B5EF4-FFF2-40B4-BE49-F238E27FC236}">
+                <a16:creationId xmlns:a16="http://schemas.microsoft.com/office/drawing/2014/main" id="{B2AE1134-D96E-2769-4EE7-C4EF6F555F56}"/>
+              </a:ext>
+            </a:extLst>
+          </p:cNvPr>
+          <p:cNvSpPr>
+            <a:spLocks noGrp="1"/>
+          </p:cNvSpPr>
+          <p:nvPr>
+            <p:ph type="title"/>
+          </p:nvPr>
+        </p:nvSpPr>
+        <p:spPr/>
+        <p:txBody>
+          <a:bodyPr/>
+          <a:lstStyle/>
+          <a:p>
+            <a:r>
+              <a:rPr lang="pt-BR" dirty="0"/>
+              <a:t>Usando </a:t>
+            </a:r>
+            <a:r>
+              <a:rPr lang="pt-BR" i="1" dirty="0"/>
+              <a:t>callbacks</a:t>
+            </a:r>
+          </a:p>
+        </p:txBody>
+      </p:sp>
+      <p:sp>
+        <p:nvSpPr>
+          <p:cNvPr id="3" name="Espaço Reservado para Conteúdo 2">
+            <a:extLst>
+              <a:ext uri="{FF2B5EF4-FFF2-40B4-BE49-F238E27FC236}">
+                <a16:creationId xmlns:a16="http://schemas.microsoft.com/office/drawing/2014/main" id="{0FABCC64-40B2-03CB-D58E-D2A089B1071E}"/>
+              </a:ext>
+            </a:extLst>
+          </p:cNvPr>
+          <p:cNvSpPr>
+            <a:spLocks noGrp="1"/>
+          </p:cNvSpPr>
+          <p:nvPr>
+            <p:ph idx="1"/>
+          </p:nvPr>
+        </p:nvSpPr>
+        <p:spPr>
+          <a:xfrm>
+            <a:off x="838200" y="1825624"/>
+            <a:ext cx="11182350" cy="5032375"/>
+          </a:xfrm>
+        </p:spPr>
+        <p:txBody>
+          <a:bodyPr>
+            <a:normAutofit/>
+          </a:bodyPr>
+          <a:lstStyle/>
+          <a:p>
+            <a:r>
+              <a:rPr lang="pt-BR" dirty="0"/>
+              <a:t>Podemos configurar o método </a:t>
+            </a:r>
+            <a:r>
+              <a:rPr lang="pt-BR" b="1" i="1" dirty="0" err="1"/>
+              <a:t>fit</a:t>
+            </a:r>
+            <a:r>
+              <a:rPr lang="pt-BR" b="1" i="1" dirty="0"/>
+              <a:t>()</a:t>
+            </a:r>
+            <a:r>
+              <a:rPr lang="pt-BR" dirty="0"/>
+              <a:t> para salvar pontos de verificação, mas como fazer esta configuração?</a:t>
+            </a:r>
+          </a:p>
+          <a:p>
+            <a:pPr lvl="1">
+              <a:buFont typeface="Wingdings" panose="05000000000000000000" pitchFamily="2" charset="2"/>
+              <a:buChar char="§"/>
+            </a:pPr>
+            <a:r>
+              <a:rPr lang="pt-BR" dirty="0"/>
+              <a:t>A resposta é: através de </a:t>
+            </a:r>
+            <a:r>
+              <a:rPr lang="pt-BR" b="1" i="1" dirty="0"/>
+              <a:t>callbacks</a:t>
+            </a:r>
+            <a:r>
+              <a:rPr lang="pt-BR" dirty="0"/>
+              <a:t>.</a:t>
+            </a:r>
+          </a:p>
+          <a:p>
+            <a:pPr lvl="1">
+              <a:buFont typeface="Wingdings" panose="05000000000000000000" pitchFamily="2" charset="2"/>
+              <a:buChar char="§"/>
+            </a:pPr>
+            <a:r>
+              <a:rPr lang="pt-BR" b="1" i="1" dirty="0"/>
+              <a:t>callbacks </a:t>
+            </a:r>
+            <a:r>
+              <a:rPr lang="pt-BR" dirty="0"/>
+              <a:t>são funções passadas como argumento para outras funções e chamadas quando um evento ocorrer.</a:t>
+            </a:r>
+          </a:p>
+          <a:p>
+            <a:r>
+              <a:rPr lang="pt-BR" dirty="0"/>
+              <a:t>O método </a:t>
+            </a:r>
+            <a:r>
+              <a:rPr lang="pt-BR" b="1" i="1" dirty="0" err="1"/>
+              <a:t>fit</a:t>
+            </a:r>
+            <a:r>
+              <a:rPr lang="pt-BR" b="1" i="1" dirty="0"/>
+              <a:t>()</a:t>
+            </a:r>
+            <a:r>
+              <a:rPr lang="pt-BR" dirty="0"/>
+              <a:t> possui um parâmetro chamado </a:t>
+            </a:r>
+            <a:r>
+              <a:rPr lang="pt-BR" b="1" i="1" dirty="0"/>
+              <a:t>callbacks</a:t>
+            </a:r>
+            <a:r>
+              <a:rPr lang="pt-BR" dirty="0"/>
+              <a:t>, que permite especificar uma lista de </a:t>
+            </a:r>
+            <a:r>
+              <a:rPr lang="pt-BR" b="1" i="1" dirty="0"/>
+              <a:t>callbacks</a:t>
+            </a:r>
+            <a:r>
+              <a:rPr lang="pt-BR" dirty="0"/>
+              <a:t> que o Keras </a:t>
+            </a:r>
+            <a:r>
+              <a:rPr lang="pt-BR" b="1" i="1" dirty="0"/>
+              <a:t>chamará durante o treinamento</a:t>
+            </a:r>
+            <a:r>
+              <a:rPr lang="pt-BR" dirty="0"/>
+              <a:t> no </a:t>
+            </a:r>
+            <a:r>
+              <a:rPr lang="pt-BR" b="1" i="1" dirty="0"/>
+              <a:t>início e no final do treinamento</a:t>
+            </a:r>
+            <a:r>
+              <a:rPr lang="pt-BR" dirty="0"/>
+              <a:t>, </a:t>
+            </a:r>
+            <a:r>
+              <a:rPr lang="pt-BR" b="1" i="1" dirty="0"/>
+              <a:t>no início e no final de cada época</a:t>
+            </a:r>
+            <a:r>
+              <a:rPr lang="pt-BR" dirty="0"/>
+              <a:t> e até </a:t>
+            </a:r>
+            <a:r>
+              <a:rPr lang="pt-BR" b="1" i="1" dirty="0"/>
+              <a:t>antes e depois do processamento de cada mini-batch</a:t>
+            </a:r>
+            <a:r>
+              <a:rPr lang="pt-BR" dirty="0"/>
+              <a:t>.</a:t>
+            </a:r>
+          </a:p>
+          <a:p>
+            <a:r>
+              <a:rPr lang="pt-BR" dirty="0"/>
+              <a:t>Veja todas as </a:t>
+            </a:r>
+            <a:r>
+              <a:rPr lang="pt-BR" b="1" i="1" dirty="0"/>
+              <a:t>callbacks</a:t>
+            </a:r>
+            <a:r>
+              <a:rPr lang="pt-BR" dirty="0"/>
+              <a:t> disponíveis em </a:t>
+            </a:r>
+            <a:r>
+              <a:rPr lang="pt-BR" dirty="0">
+                <a:hlinkClick r:id="rId3"/>
+              </a:rPr>
+              <a:t>https://keras.io/callbacks/</a:t>
+            </a:r>
+            <a:endParaRPr lang="pt-BR" dirty="0"/>
+          </a:p>
+        </p:txBody>
+      </p:sp>
+    </p:spTree>
+    <p:extLst>
+      <p:ext uri="{BB962C8B-B14F-4D97-AF65-F5344CB8AC3E}">
+        <p14:creationId xmlns:p14="http://schemas.microsoft.com/office/powerpoint/2010/main" val="2845925071"/>
+      </p:ext>
+    </p:extLst>
+  </p:cSld>
+  <p:clrMapOvr>
+    <a:masterClrMapping/>
+  </p:clrMapOvr>
+</p:sld>
+</file>
+
+<file path=ppt/slides/slide33.xml><?xml version="1.0" encoding="utf-8"?>
 <p:sld xmlns:a="http://schemas.openxmlformats.org/drawingml/2006/main" xmlns:r="http://schemas.openxmlformats.org/officeDocument/2006/relationships" xmlns:p="http://schemas.openxmlformats.org/presentationml/2006/main">
   <p:cSld>
     <p:spTree>
@@ -39863,92 +40217,6 @@
     <p:extLst>
       <p:ext uri="{BB962C8B-B14F-4D97-AF65-F5344CB8AC3E}">
         <p14:creationId xmlns:p14="http://schemas.microsoft.com/office/powerpoint/2010/main" val="2893870506"/>
-      </p:ext>
-    </p:extLst>
-  </p:cSld>
-  <p:clrMapOvr>
-    <a:masterClrMapping/>
-  </p:clrMapOvr>
-</p:sld>
-</file>
-
-<file path=ppt/slides/slide33.xml><?xml version="1.0" encoding="utf-8"?>
-<p:sld xmlns:a="http://schemas.openxmlformats.org/drawingml/2006/main" xmlns:r="http://schemas.openxmlformats.org/officeDocument/2006/relationships" xmlns:p="http://schemas.openxmlformats.org/presentationml/2006/main">
-  <p:cSld>
-    <p:spTree>
-      <p:nvGrpSpPr>
-        <p:cNvPr id="1" name=""/>
-        <p:cNvGrpSpPr/>
-        <p:nvPr/>
-      </p:nvGrpSpPr>
-      <p:grpSpPr>
-        <a:xfrm>
-          <a:off x="0" y="0"/>
-          <a:ext cx="0" cy="0"/>
-          <a:chOff x="0" y="0"/>
-          <a:chExt cx="0" cy="0"/>
-        </a:xfrm>
-      </p:grpSpPr>
-      <p:sp>
-        <p:nvSpPr>
-          <p:cNvPr id="4" name="Título 1">
-            <a:extLst>
-              <a:ext uri="{FF2B5EF4-FFF2-40B4-BE49-F238E27FC236}">
-                <a16:creationId xmlns:a16="http://schemas.microsoft.com/office/drawing/2014/main" id="{32666AC8-2E17-4DB4-B0F5-60C640CCFD2E}"/>
-              </a:ext>
-            </a:extLst>
-          </p:cNvPr>
-          <p:cNvSpPr txBox="1">
-            <a:spLocks/>
-          </p:cNvSpPr>
-          <p:nvPr/>
-        </p:nvSpPr>
-        <p:spPr>
-          <a:xfrm>
-            <a:off x="1431533" y="2720526"/>
-            <a:ext cx="9144000" cy="1029541"/>
-          </a:xfrm>
-          <a:prstGeom prst="rect">
-            <a:avLst/>
-          </a:prstGeom>
-        </p:spPr>
-        <p:txBody>
-          <a:bodyPr vert="horz" lIns="91440" tIns="45720" rIns="91440" bIns="45720" rtlCol="0" anchor="ctr">
-            <a:normAutofit/>
-          </a:bodyPr>
-          <a:lstStyle>
-            <a:lvl1pPr algn="l" defTabSz="914400" rtl="0" eaLnBrk="1" latinLnBrk="0" hangingPunct="1">
-              <a:lnSpc>
-                <a:spcPct val="90000"/>
-              </a:lnSpc>
-              <a:spcBef>
-                <a:spcPct val="0"/>
-              </a:spcBef>
-              <a:buNone/>
-              <a:defRPr sz="4400" kern="1200">
-                <a:solidFill>
-                  <a:schemeClr val="tx1"/>
-                </a:solidFill>
-                <a:latin typeface="+mj-lt"/>
-                <a:ea typeface="+mj-ea"/>
-                <a:cs typeface="+mj-cs"/>
-              </a:defRPr>
-            </a:lvl1pPr>
-          </a:lstStyle>
-          <a:p>
-            <a:pPr algn="ctr"/>
-            <a:r>
-              <a:rPr lang="pt-BR" sz="6600" dirty="0"/>
-              <a:t>Perguntas?</a:t>
-            </a:r>
-            <a:endParaRPr lang="pt-BR" sz="6600" b="1" i="1" dirty="0"/>
-          </a:p>
-        </p:txBody>
-      </p:sp>
-    </p:spTree>
-    <p:extLst>
-      <p:ext uri="{BB962C8B-B14F-4D97-AF65-F5344CB8AC3E}">
-        <p14:creationId xmlns:p14="http://schemas.microsoft.com/office/powerpoint/2010/main" val="1975981511"/>
       </p:ext>
     </p:extLst>
   </p:cSld>
@@ -40025,6 +40293,92 @@
             <a:pPr algn="ctr"/>
             <a:r>
               <a:rPr lang="pt-BR" sz="6600" dirty="0"/>
+              <a:t>Perguntas?</a:t>
+            </a:r>
+            <a:endParaRPr lang="pt-BR" sz="6600" b="1" i="1" dirty="0"/>
+          </a:p>
+        </p:txBody>
+      </p:sp>
+    </p:spTree>
+    <p:extLst>
+      <p:ext uri="{BB962C8B-B14F-4D97-AF65-F5344CB8AC3E}">
+        <p14:creationId xmlns:p14="http://schemas.microsoft.com/office/powerpoint/2010/main" val="1975981511"/>
+      </p:ext>
+    </p:extLst>
+  </p:cSld>
+  <p:clrMapOvr>
+    <a:masterClrMapping/>
+  </p:clrMapOvr>
+</p:sld>
+</file>
+
+<file path=ppt/slides/slide35.xml><?xml version="1.0" encoding="utf-8"?>
+<p:sld xmlns:a="http://schemas.openxmlformats.org/drawingml/2006/main" xmlns:r="http://schemas.openxmlformats.org/officeDocument/2006/relationships" xmlns:p="http://schemas.openxmlformats.org/presentationml/2006/main">
+  <p:cSld>
+    <p:spTree>
+      <p:nvGrpSpPr>
+        <p:cNvPr id="1" name=""/>
+        <p:cNvGrpSpPr/>
+        <p:nvPr/>
+      </p:nvGrpSpPr>
+      <p:grpSpPr>
+        <a:xfrm>
+          <a:off x="0" y="0"/>
+          <a:ext cx="0" cy="0"/>
+          <a:chOff x="0" y="0"/>
+          <a:chExt cx="0" cy="0"/>
+        </a:xfrm>
+      </p:grpSpPr>
+      <p:sp>
+        <p:nvSpPr>
+          <p:cNvPr id="4" name="Título 1">
+            <a:extLst>
+              <a:ext uri="{FF2B5EF4-FFF2-40B4-BE49-F238E27FC236}">
+                <a16:creationId xmlns:a16="http://schemas.microsoft.com/office/drawing/2014/main" id="{32666AC8-2E17-4DB4-B0F5-60C640CCFD2E}"/>
+              </a:ext>
+            </a:extLst>
+          </p:cNvPr>
+          <p:cNvSpPr txBox="1">
+            <a:spLocks/>
+          </p:cNvSpPr>
+          <p:nvPr/>
+        </p:nvSpPr>
+        <p:spPr>
+          <a:xfrm>
+            <a:off x="1431533" y="2720526"/>
+            <a:ext cx="9144000" cy="1029541"/>
+          </a:xfrm>
+          <a:prstGeom prst="rect">
+            <a:avLst/>
+          </a:prstGeom>
+        </p:spPr>
+        <p:txBody>
+          <a:bodyPr vert="horz" lIns="91440" tIns="45720" rIns="91440" bIns="45720" rtlCol="0" anchor="ctr">
+            <a:normAutofit/>
+          </a:bodyPr>
+          <a:lstStyle>
+            <a:lvl1pPr algn="l" defTabSz="914400" rtl="0" eaLnBrk="1" latinLnBrk="0" hangingPunct="1">
+              <a:lnSpc>
+                <a:spcPct val="90000"/>
+              </a:lnSpc>
+              <a:spcBef>
+                <a:spcPct val="0"/>
+              </a:spcBef>
+              <a:buNone/>
+              <a:defRPr sz="4400" kern="1200">
+                <a:solidFill>
+                  <a:schemeClr val="tx1"/>
+                </a:solidFill>
+                <a:latin typeface="+mj-lt"/>
+                <a:ea typeface="+mj-ea"/>
+                <a:cs typeface="+mj-cs"/>
+              </a:defRPr>
+            </a:lvl1pPr>
+          </a:lstStyle>
+          <a:p>
+            <a:pPr algn="ctr"/>
+            <a:r>
+              <a:rPr lang="pt-BR" sz="6600" dirty="0"/>
               <a:t>Obrigado!</a:t>
             </a:r>
             <a:endParaRPr lang="pt-BR" sz="6600" b="1" i="1" dirty="0"/>
@@ -40044,7 +40398,7 @@
 </p:sld>
 </file>
 
-<file path=ppt/slides/slide35.xml><?xml version="1.0" encoding="utf-8"?>
+<file path=ppt/slides/slide36.xml><?xml version="1.0" encoding="utf-8"?>
 <p:sld xmlns:a="http://schemas.openxmlformats.org/drawingml/2006/main" xmlns:r="http://schemas.openxmlformats.org/officeDocument/2006/relationships" xmlns:p="http://schemas.openxmlformats.org/presentationml/2006/main">
   <p:cSld>
     <p:spTree>
@@ -44241,7 +44595,7 @@
 </p:sld>
 </file>
 
-<file path=ppt/slides/slide36.xml><?xml version="1.0" encoding="utf-8"?>
+<file path=ppt/slides/slide37.xml><?xml version="1.0" encoding="utf-8"?>
 <p:sld xmlns:a="http://schemas.openxmlformats.org/drawingml/2006/main" xmlns:r="http://schemas.openxmlformats.org/officeDocument/2006/relationships" xmlns:p="http://schemas.openxmlformats.org/presentationml/2006/main">
   <p:cSld>
     <p:spTree>
@@ -47371,8 +47725,8 @@
             </p:style>
           </p:cxnSp>
         </p:grpSp>
-        <mc:AlternateContent xmlns:mc="http://schemas.openxmlformats.org/markup-compatibility/2006">
-          <mc:Choice xmlns:a14="http://schemas.microsoft.com/office/drawing/2010/main" Requires="a14">
+        <mc:AlternateContent xmlns:mc="http://schemas.openxmlformats.org/markup-compatibility/2006" xmlns:a14="http://schemas.microsoft.com/office/drawing/2010/main">
+          <mc:Choice Requires="a14">
             <p:sp>
               <p:nvSpPr>
                 <p:cNvPr id="100" name="CaixaDeTexto 99">
@@ -47441,7 +47795,7 @@
               </p:txBody>
             </p:sp>
           </mc:Choice>
-          <mc:Fallback>
+          <mc:Fallback xmlns="">
             <p:sp>
               <p:nvSpPr>
                 <p:cNvPr id="100" name="CaixaDeTexto 99">
@@ -47486,8 +47840,8 @@
             </p:sp>
           </mc:Fallback>
         </mc:AlternateContent>
-        <mc:AlternateContent xmlns:mc="http://schemas.openxmlformats.org/markup-compatibility/2006">
-          <mc:Choice xmlns:a14="http://schemas.microsoft.com/office/drawing/2010/main" Requires="a14">
+        <mc:AlternateContent xmlns:mc="http://schemas.openxmlformats.org/markup-compatibility/2006" xmlns:a14="http://schemas.microsoft.com/office/drawing/2010/main">
+          <mc:Choice Requires="a14">
             <p:sp>
               <p:nvSpPr>
                 <p:cNvPr id="101" name="CaixaDeTexto 100">
@@ -47556,7 +47910,7 @@
               </p:txBody>
             </p:sp>
           </mc:Choice>
-          <mc:Fallback>
+          <mc:Fallback xmlns="">
             <p:sp>
               <p:nvSpPr>
                 <p:cNvPr id="101" name="CaixaDeTexto 100">
@@ -47601,8 +47955,8 @@
             </p:sp>
           </mc:Fallback>
         </mc:AlternateContent>
-        <mc:AlternateContent xmlns:mc="http://schemas.openxmlformats.org/markup-compatibility/2006">
-          <mc:Choice xmlns:a14="http://schemas.microsoft.com/office/drawing/2010/main" Requires="a14">
+        <mc:AlternateContent xmlns:mc="http://schemas.openxmlformats.org/markup-compatibility/2006" xmlns:a14="http://schemas.microsoft.com/office/drawing/2010/main">
+          <mc:Choice Requires="a14">
             <p:sp>
               <p:nvSpPr>
                 <p:cNvPr id="102" name="CaixaDeTexto 101">
@@ -47683,7 +48037,7 @@
               </p:txBody>
             </p:sp>
           </mc:Choice>
-          <mc:Fallback>
+          <mc:Fallback xmlns="">
             <p:sp>
               <p:nvSpPr>
                 <p:cNvPr id="102" name="CaixaDeTexto 101">
@@ -47728,8 +48082,8 @@
             </p:sp>
           </mc:Fallback>
         </mc:AlternateContent>
-        <mc:AlternateContent xmlns:mc="http://schemas.openxmlformats.org/markup-compatibility/2006">
-          <mc:Choice xmlns:a14="http://schemas.microsoft.com/office/drawing/2010/main" Requires="a14">
+        <mc:AlternateContent xmlns:mc="http://schemas.openxmlformats.org/markup-compatibility/2006" xmlns:a14="http://schemas.microsoft.com/office/drawing/2010/main">
+          <mc:Choice Requires="a14">
             <p:sp>
               <p:nvSpPr>
                 <p:cNvPr id="103" name="CaixaDeTexto 102">
@@ -47810,7 +48164,7 @@
               </p:txBody>
             </p:sp>
           </mc:Choice>
-          <mc:Fallback>
+          <mc:Fallback xmlns="">
             <p:sp>
               <p:nvSpPr>
                 <p:cNvPr id="103" name="CaixaDeTexto 102">
@@ -55646,8 +56000,8 @@
           </p:sp>
         </mc:Fallback>
       </mc:AlternateContent>
-      <mc:AlternateContent xmlns:mc="http://schemas.openxmlformats.org/markup-compatibility/2006">
-        <mc:Choice xmlns:a14="http://schemas.microsoft.com/office/drawing/2010/main" Requires="a14">
+      <mc:AlternateContent xmlns:mc="http://schemas.openxmlformats.org/markup-compatibility/2006" xmlns:a14="http://schemas.microsoft.com/office/drawing/2010/main">
+        <mc:Choice Requires="a14">
           <p:sp>
             <p:nvSpPr>
               <p:cNvPr id="6" name="CaixaDeTexto 5">
@@ -55728,7 +56082,7 @@
             </p:txBody>
           </p:sp>
         </mc:Choice>
-        <mc:Fallback>
+        <mc:Fallback xmlns="">
           <p:sp>
             <p:nvSpPr>
               <p:cNvPr id="6" name="CaixaDeTexto 5">
@@ -55773,8 +56127,8 @@
           </p:sp>
         </mc:Fallback>
       </mc:AlternateContent>
-      <mc:AlternateContent xmlns:mc="http://schemas.openxmlformats.org/markup-compatibility/2006">
-        <mc:Choice xmlns:a14="http://schemas.microsoft.com/office/drawing/2010/main" Requires="a14">
+      <mc:AlternateContent xmlns:mc="http://schemas.openxmlformats.org/markup-compatibility/2006" xmlns:a14="http://schemas.microsoft.com/office/drawing/2010/main">
+        <mc:Choice Requires="a14">
           <p:sp>
             <p:nvSpPr>
               <p:cNvPr id="7" name="CaixaDeTexto 6">
@@ -55855,7 +56209,7 @@
             </p:txBody>
           </p:sp>
         </mc:Choice>
-        <mc:Fallback>
+        <mc:Fallback xmlns="">
           <p:sp>
             <p:nvSpPr>
               <p:cNvPr id="7" name="CaixaDeTexto 6">
@@ -58598,8 +58952,8 @@
           </a:p>
         </p:txBody>
       </p:sp>
-      <mc:AlternateContent xmlns:mc="http://schemas.openxmlformats.org/markup-compatibility/2006">
-        <mc:Choice xmlns:a14="http://schemas.microsoft.com/office/drawing/2010/main" Requires="a14">
+      <mc:AlternateContent xmlns:mc="http://schemas.openxmlformats.org/markup-compatibility/2006" xmlns:a14="http://schemas.microsoft.com/office/drawing/2010/main">
+        <mc:Choice Requires="a14">
           <p:sp>
             <p:nvSpPr>
               <p:cNvPr id="43" name="CaixaDeTexto 42">
@@ -58680,7 +59034,7 @@
             </p:txBody>
           </p:sp>
         </mc:Choice>
-        <mc:Fallback>
+        <mc:Fallback xmlns="">
           <p:sp>
             <p:nvSpPr>
               <p:cNvPr id="43" name="CaixaDeTexto 42">
@@ -58725,8 +59079,8 @@
           </p:sp>
         </mc:Fallback>
       </mc:AlternateContent>
-      <mc:AlternateContent xmlns:mc="http://schemas.openxmlformats.org/markup-compatibility/2006">
-        <mc:Choice xmlns:a14="http://schemas.microsoft.com/office/drawing/2010/main" Requires="a14">
+      <mc:AlternateContent xmlns:mc="http://schemas.openxmlformats.org/markup-compatibility/2006" xmlns:a14="http://schemas.microsoft.com/office/drawing/2010/main">
+        <mc:Choice Requires="a14">
           <p:sp>
             <p:nvSpPr>
               <p:cNvPr id="45" name="CaixaDeTexto 44">
@@ -58807,7 +59161,7 @@
             </p:txBody>
           </p:sp>
         </mc:Choice>
-        <mc:Fallback>
+        <mc:Fallback xmlns="">
           <p:sp>
             <p:nvSpPr>
               <p:cNvPr id="45" name="CaixaDeTexto 44">
